--- a/Reporte 020926.pptx
+++ b/Reporte 020926.pptx
@@ -5,7 +5,7 @@
     <p:sldMasterId id="2147483672" r:id="rId1"/>
   </p:sldMasterIdLst>
   <p:notesMasterIdLst>
-    <p:notesMasterId r:id="rId18"/>
+    <p:notesMasterId r:id="rId19"/>
   </p:notesMasterIdLst>
   <p:sldIdLst>
     <p:sldId id="350" r:id="rId2"/>
@@ -23,22 +23,23 @@
     <p:sldId id="412" r:id="rId14"/>
     <p:sldId id="371" r:id="rId15"/>
     <p:sldId id="413" r:id="rId16"/>
-    <p:sldId id="280" r:id="rId17"/>
+    <p:sldId id="414" r:id="rId17"/>
+    <p:sldId id="280" r:id="rId18"/>
   </p:sldIdLst>
   <p:sldSz cx="9144000" cy="5143500" type="screen16x9"/>
   <p:notesSz cx="6858000" cy="9144000"/>
   <p:embeddedFontLst>
     <p:embeddedFont>
       <p:font typeface="Montserrat" panose="00000500000000000000" pitchFamily="2" charset="0"/>
-      <p:regular r:id="rId19"/>
-      <p:bold r:id="rId20"/>
-      <p:italic r:id="rId21"/>
-      <p:boldItalic r:id="rId22"/>
+      <p:regular r:id="rId20"/>
+      <p:bold r:id="rId21"/>
+      <p:italic r:id="rId22"/>
+      <p:boldItalic r:id="rId23"/>
     </p:embeddedFont>
     <p:embeddedFont>
       <p:font typeface="Montserrat Black" panose="00000A00000000000000" pitchFamily="2" charset="0"/>
-      <p:bold r:id="rId23"/>
-      <p:boldItalic r:id="rId24"/>
+      <p:bold r:id="rId24"/>
+      <p:boldItalic r:id="rId25"/>
     </p:embeddedFont>
   </p:embeddedFontLst>
   <p:defaultTextStyle>
@@ -6550,10 +6551,10 @@
       </p:sp>
       <p:pic>
         <p:nvPicPr>
-          <p:cNvPr id="5" name="Imagen 4">
+          <p:cNvPr id="4" name="Imagen 3">
             <a:extLst>
               <a:ext uri="{FF2B5EF4-FFF2-40B4-BE49-F238E27FC236}">
-                <a16:creationId xmlns:a16="http://schemas.microsoft.com/office/drawing/2014/main" id="{0E1D9F03-BC78-F598-7AD3-F655A08799C6}"/>
+                <a16:creationId xmlns:a16="http://schemas.microsoft.com/office/drawing/2014/main" id="{C665631E-D63C-AB46-8B15-A84215D1ACEA}"/>
               </a:ext>
             </a:extLst>
           </p:cNvPr>
@@ -6570,8 +6571,8 @@
         </p:blipFill>
         <p:spPr>
           <a:xfrm>
-            <a:off x="0" y="886459"/>
-            <a:ext cx="9144000" cy="3513458"/>
+            <a:off x="0" y="931553"/>
+            <a:ext cx="9144000" cy="3423269"/>
           </a:xfrm>
           <a:prstGeom prst="rect">
             <a:avLst/>
@@ -6656,10 +6657,10 @@
       </p:sp>
       <p:pic>
         <p:nvPicPr>
-          <p:cNvPr id="4" name="Imagen 3">
+          <p:cNvPr id="3" name="Imagen 2">
             <a:extLst>
               <a:ext uri="{FF2B5EF4-FFF2-40B4-BE49-F238E27FC236}">
-                <a16:creationId xmlns:a16="http://schemas.microsoft.com/office/drawing/2014/main" id="{3F3BAC27-FF07-F9A2-EFB3-5EBFADAC87DA}"/>
+                <a16:creationId xmlns:a16="http://schemas.microsoft.com/office/drawing/2014/main" id="{CE32CE3E-17B5-F4A8-F972-EE96E32CBE1B}"/>
               </a:ext>
             </a:extLst>
           </p:cNvPr>
@@ -6676,8 +6677,8 @@
         </p:blipFill>
         <p:spPr>
           <a:xfrm>
-            <a:off x="-6725" y="1342315"/>
-            <a:ext cx="9144000" cy="2601746"/>
+            <a:off x="0" y="1337988"/>
+            <a:ext cx="9144000" cy="2610399"/>
           </a:xfrm>
           <a:prstGeom prst="rect">
             <a:avLst/>
@@ -6762,10 +6763,10 @@
       </p:sp>
       <p:pic>
         <p:nvPicPr>
-          <p:cNvPr id="4" name="Imagen 3">
+          <p:cNvPr id="5" name="Imagen 4">
             <a:extLst>
               <a:ext uri="{FF2B5EF4-FFF2-40B4-BE49-F238E27FC236}">
-                <a16:creationId xmlns:a16="http://schemas.microsoft.com/office/drawing/2014/main" id="{94291237-6107-6FFB-5795-D57B7680F0E4}"/>
+                <a16:creationId xmlns:a16="http://schemas.microsoft.com/office/drawing/2014/main" id="{EDD1AEB9-B9CE-B3B4-350C-C203B65AFA51}"/>
               </a:ext>
             </a:extLst>
           </p:cNvPr>
@@ -6782,8 +6783,8 @@
         </p:blipFill>
         <p:spPr>
           <a:xfrm>
-            <a:off x="-6725" y="713082"/>
-            <a:ext cx="9144000" cy="3860211"/>
+            <a:off x="0" y="769199"/>
+            <a:ext cx="9144000" cy="3747977"/>
           </a:xfrm>
           <a:prstGeom prst="rect">
             <a:avLst/>
@@ -6868,10 +6869,10 @@
       </p:sp>
       <p:pic>
         <p:nvPicPr>
-          <p:cNvPr id="4" name="Imagen 3">
+          <p:cNvPr id="3" name="Imagen 2">
             <a:extLst>
               <a:ext uri="{FF2B5EF4-FFF2-40B4-BE49-F238E27FC236}">
-                <a16:creationId xmlns:a16="http://schemas.microsoft.com/office/drawing/2014/main" id="{564EEA69-8E7A-0BC9-8B82-78E9252FCCE6}"/>
+                <a16:creationId xmlns:a16="http://schemas.microsoft.com/office/drawing/2014/main" id="{DE91798E-80A1-91B6-7250-DFB94D002B25}"/>
               </a:ext>
             </a:extLst>
           </p:cNvPr>
@@ -6888,8 +6889,8 @@
         </p:blipFill>
         <p:spPr>
           <a:xfrm>
-            <a:off x="0" y="1201156"/>
-            <a:ext cx="9144000" cy="2741188"/>
+            <a:off x="-6725" y="1341261"/>
+            <a:ext cx="9144000" cy="2603853"/>
           </a:xfrm>
           <a:prstGeom prst="rect">
             <a:avLst/>
@@ -6974,10 +6975,10 @@
       </p:sp>
       <p:pic>
         <p:nvPicPr>
-          <p:cNvPr id="4" name="Imagen 3">
+          <p:cNvPr id="3" name="Imagen 2">
             <a:extLst>
               <a:ext uri="{FF2B5EF4-FFF2-40B4-BE49-F238E27FC236}">
-                <a16:creationId xmlns:a16="http://schemas.microsoft.com/office/drawing/2014/main" id="{48D8438B-CCEA-0E4C-EBB7-52BF7F507E73}"/>
+                <a16:creationId xmlns:a16="http://schemas.microsoft.com/office/drawing/2014/main" id="{C783AA7A-D4CF-E8EA-B816-ED6E4C291765}"/>
               </a:ext>
             </a:extLst>
           </p:cNvPr>
@@ -6994,8 +6995,8 @@
         </p:blipFill>
         <p:spPr>
           <a:xfrm>
-            <a:off x="0" y="1569652"/>
-            <a:ext cx="9144000" cy="2147072"/>
+            <a:off x="0" y="703321"/>
+            <a:ext cx="9144000" cy="3879734"/>
           </a:xfrm>
           <a:prstGeom prst="rect">
             <a:avLst/>
@@ -7086,10 +7087,10 @@
       </p:sp>
       <p:pic>
         <p:nvPicPr>
-          <p:cNvPr id="3" name="Imagen 2">
+          <p:cNvPr id="4" name="Imagen 3">
             <a:extLst>
               <a:ext uri="{FF2B5EF4-FFF2-40B4-BE49-F238E27FC236}">
-                <a16:creationId xmlns:a16="http://schemas.microsoft.com/office/drawing/2014/main" id="{7670B953-0E9F-37B9-200D-A596BE2FAE34}"/>
+                <a16:creationId xmlns:a16="http://schemas.microsoft.com/office/drawing/2014/main" id="{160617DC-89EC-622D-6324-512A9D63EB66}"/>
               </a:ext>
             </a:extLst>
           </p:cNvPr>
@@ -7106,8 +7107,8 @@
         </p:blipFill>
         <p:spPr>
           <a:xfrm>
-            <a:off x="0" y="376143"/>
-            <a:ext cx="9144000" cy="4534090"/>
+            <a:off x="0" y="395912"/>
+            <a:ext cx="9144000" cy="1794333"/>
           </a:xfrm>
           <a:prstGeom prst="rect">
             <a:avLst/>
@@ -7128,6 +7129,118 @@
 </file>
 
 <file path=ppt/slides/slide16.xml><?xml version="1.0" encoding="utf-8"?>
+<p:sld xmlns:a="http://schemas.openxmlformats.org/drawingml/2006/main" xmlns:r="http://schemas.openxmlformats.org/officeDocument/2006/relationships" xmlns:p="http://schemas.openxmlformats.org/presentationml/2006/main">
+  <p:cSld>
+    <p:bg>
+      <p:bgPr>
+        <a:solidFill>
+          <a:srgbClr val="F8F9FA"/>
+        </a:solidFill>
+        <a:effectLst/>
+      </p:bgPr>
+    </p:bg>
+    <p:spTree>
+      <p:nvGrpSpPr>
+        <p:cNvPr id="1" name="">
+          <a:extLst>
+            <a:ext uri="{FF2B5EF4-FFF2-40B4-BE49-F238E27FC236}">
+              <a16:creationId xmlns:a16="http://schemas.microsoft.com/office/drawing/2014/main" id="{F954BB7A-33F4-53F8-05A5-314B8726D508}"/>
+            </a:ext>
+          </a:extLst>
+        </p:cNvPr>
+        <p:cNvGrpSpPr/>
+        <p:nvPr/>
+      </p:nvGrpSpPr>
+      <p:grpSpPr>
+        <a:xfrm>
+          <a:off x="0" y="0"/>
+          <a:ext cx="0" cy="0"/>
+          <a:chOff x="0" y="0"/>
+          <a:chExt cx="0" cy="0"/>
+        </a:xfrm>
+      </p:grpSpPr>
+      <p:sp>
+        <p:nvSpPr>
+          <p:cNvPr id="5" name="CuadroTexto 4">
+            <a:extLst>
+              <a:ext uri="{FF2B5EF4-FFF2-40B4-BE49-F238E27FC236}">
+                <a16:creationId xmlns:a16="http://schemas.microsoft.com/office/drawing/2014/main" id="{FC0404B5-4456-F36A-2986-E1E32444A99E}"/>
+              </a:ext>
+            </a:extLst>
+          </p:cNvPr>
+          <p:cNvSpPr txBox="1"/>
+          <p:nvPr/>
+        </p:nvSpPr>
+        <p:spPr>
+          <a:xfrm>
+            <a:off x="1926166" y="88135"/>
+            <a:ext cx="5291667" cy="307777"/>
+          </a:xfrm>
+          <a:prstGeom prst="rect">
+            <a:avLst/>
+          </a:prstGeom>
+          <a:noFill/>
+        </p:spPr>
+        <p:txBody>
+          <a:bodyPr wrap="square" rtlCol="0">
+            <a:spAutoFit/>
+          </a:bodyPr>
+          <a:lstStyle/>
+          <a:p>
+            <a:pPr algn="ctr"/>
+            <a:r>
+              <a:rPr lang="es-MX" b="1" dirty="0">
+                <a:latin typeface="Montserrat" pitchFamily="2" charset="0"/>
+              </a:rPr>
+              <a:t>Opinión emitida por radioescuchas</a:t>
+            </a:r>
+          </a:p>
+        </p:txBody>
+      </p:sp>
+      <p:pic>
+        <p:nvPicPr>
+          <p:cNvPr id="3" name="Imagen 2">
+            <a:extLst>
+              <a:ext uri="{FF2B5EF4-FFF2-40B4-BE49-F238E27FC236}">
+                <a16:creationId xmlns:a16="http://schemas.microsoft.com/office/drawing/2014/main" id="{B1359560-B016-C654-8778-5138EF539062}"/>
+              </a:ext>
+            </a:extLst>
+          </p:cNvPr>
+          <p:cNvPicPr>
+            <a:picLocks noChangeAspect="1"/>
+          </p:cNvPicPr>
+          <p:nvPr/>
+        </p:nvPicPr>
+        <p:blipFill>
+          <a:blip r:embed="rId2"/>
+          <a:stretch>
+            <a:fillRect/>
+          </a:stretch>
+        </p:blipFill>
+        <p:spPr>
+          <a:xfrm>
+            <a:off x="763044" y="0"/>
+            <a:ext cx="2045112" cy="5143500"/>
+          </a:xfrm>
+          <a:prstGeom prst="rect">
+            <a:avLst/>
+          </a:prstGeom>
+        </p:spPr>
+      </p:pic>
+    </p:spTree>
+    <p:extLst>
+      <p:ext uri="{BB962C8B-B14F-4D97-AF65-F5344CB8AC3E}">
+        <p14:creationId xmlns:p14="http://schemas.microsoft.com/office/powerpoint/2010/main" val="457865431"/>
+      </p:ext>
+    </p:extLst>
+  </p:cSld>
+  <p:clrMapOvr>
+    <a:masterClrMapping/>
+  </p:clrMapOvr>
+</p:sld>
+</file>
+
+<file path=ppt/slides/slide17.xml><?xml version="1.0" encoding="utf-8"?>
 <p:sld xmlns:a="http://schemas.openxmlformats.org/drawingml/2006/main" xmlns:r="http://schemas.openxmlformats.org/officeDocument/2006/relationships" xmlns:p="http://schemas.openxmlformats.org/presentationml/2006/main">
   <p:cSld>
     <p:spTree>
